--- a/topic-11-week11/unit-2/talk-1/platforms1.pptx
+++ b/topic-11-week11/unit-2/talk-1/platforms1.pptx
@@ -19,10 +19,10 @@
     <p:sldId id="282" r:id="rId10"/>
     <p:sldId id="284" r:id="rId11"/>
     <p:sldId id="285" r:id="rId12"/>
-    <p:sldId id="286" r:id="rId13"/>
-    <p:sldId id="280" r:id="rId14"/>
-    <p:sldId id="288" r:id="rId15"/>
-    <p:sldId id="289" r:id="rId16"/>
+    <p:sldId id="280" r:id="rId13"/>
+    <p:sldId id="288" r:id="rId14"/>
+    <p:sldId id="289" r:id="rId15"/>
+    <p:sldId id="286" r:id="rId16"/>
   </p:sldIdLst>
   <p:sldSz cx="12192000" cy="6858000"/>
   <p:notesSz cx="6858000" cy="9144000"/>
@@ -9586,128 +9586,6 @@
           <p:cNvPr id="2" name="Title 1">
             <a:extLst>
               <a:ext uri="{FF2B5EF4-FFF2-40B4-BE49-F238E27FC236}">
-                <a16:creationId xmlns:a16="http://schemas.microsoft.com/office/drawing/2014/main" id="{DFA997CB-72C9-40BB-8F35-C513EDD61399}"/>
-              </a:ext>
-            </a:extLst>
-          </p:cNvPr>
-          <p:cNvSpPr>
-            <a:spLocks noGrp="1"/>
-          </p:cNvSpPr>
-          <p:nvPr>
-            <p:ph type="title"/>
-          </p:nvPr>
-        </p:nvSpPr>
-        <p:spPr/>
-        <p:txBody>
-          <a:bodyPr/>
-          <a:lstStyle/>
-          <a:p>
-            <a:r>
-              <a:rPr lang="en-US">
-                <a:cs typeface="Calibri Light"/>
-              </a:rPr>
-              <a:t>Other Platforms</a:t>
-            </a:r>
-            <a:endParaRPr lang="en-US"/>
-          </a:p>
-        </p:txBody>
-      </p:sp>
-      <p:sp>
-        <p:nvSpPr>
-          <p:cNvPr id="3" name="Content Placeholder 2">
-            <a:extLst>
-              <a:ext uri="{FF2B5EF4-FFF2-40B4-BE49-F238E27FC236}">
-                <a16:creationId xmlns:a16="http://schemas.microsoft.com/office/drawing/2014/main" id="{72B9AFA0-2B31-44B0-8CEE-9179C42EE652}"/>
-              </a:ext>
-            </a:extLst>
-          </p:cNvPr>
-          <p:cNvSpPr>
-            <a:spLocks noGrp="1"/>
-          </p:cNvSpPr>
-          <p:nvPr>
-            <p:ph idx="1"/>
-          </p:nvPr>
-        </p:nvSpPr>
-        <p:spPr/>
-        <p:txBody>
-          <a:bodyPr vert="horz" lIns="91440" tIns="45720" rIns="91440" bIns="45720" rtlCol="0" anchor="t">
-            <a:normAutofit/>
-          </a:bodyPr>
-          <a:lstStyle/>
-          <a:p>
-            <a:r>
-              <a:rPr lang="en-US" dirty="0" err="1">
-                <a:cs typeface="Calibri"/>
-              </a:rPr>
-              <a:t>Ubidots</a:t>
-            </a:r>
-          </a:p>
-          <a:p>
-            <a:r>
-              <a:rPr lang="en-US" dirty="0">
-                <a:cs typeface="Calibri"/>
-              </a:rPr>
-              <a:t>Amazon Web Services</a:t>
-            </a:r>
-          </a:p>
-          <a:p>
-            <a:r>
-              <a:rPr lang="en-US" dirty="0">
-                <a:cs typeface="Calibri"/>
-              </a:rPr>
-              <a:t>Microsoft Azure</a:t>
-            </a:r>
-          </a:p>
-          <a:p>
-            <a:r>
-              <a:rPr lang="en-US" dirty="0" err="1">
-                <a:cs typeface="Calibri"/>
-              </a:rPr>
-              <a:t>Evothings</a:t>
-            </a:r>
-          </a:p>
-          <a:p>
-            <a:endParaRPr lang="en-US" dirty="0">
-              <a:cs typeface="Calibri"/>
-            </a:endParaRPr>
-          </a:p>
-        </p:txBody>
-      </p:sp>
-    </p:spTree>
-    <p:extLst>
-      <p:ext uri="{BB962C8B-B14F-4D97-AF65-F5344CB8AC3E}">
-        <p14:creationId xmlns:p14="http://schemas.microsoft.com/office/powerpoint/2010/main" val="2966305536"/>
-      </p:ext>
-    </p:extLst>
-  </p:cSld>
-  <p:clrMapOvr>
-    <a:masterClrMapping/>
-  </p:clrMapOvr>
-</p:sld>
-</file>
-
-<file path=ppt/slides/slide13.xml><?xml version="1.0" encoding="utf-8"?>
-<p:sld xmlns:a="http://schemas.openxmlformats.org/drawingml/2006/main" xmlns:r="http://schemas.openxmlformats.org/officeDocument/2006/relationships" xmlns:p="http://schemas.openxmlformats.org/presentationml/2006/main">
-  <p:cSld>
-    <p:spTree>
-      <p:nvGrpSpPr>
-        <p:cNvPr id="1" name=""/>
-        <p:cNvGrpSpPr/>
-        <p:nvPr/>
-      </p:nvGrpSpPr>
-      <p:grpSpPr>
-        <a:xfrm>
-          <a:off x="0" y="0"/>
-          <a:ext cx="0" cy="0"/>
-          <a:chOff x="0" y="0"/>
-          <a:chExt cx="0" cy="0"/>
-        </a:xfrm>
-      </p:grpSpPr>
-      <p:sp>
-        <p:nvSpPr>
-          <p:cNvPr id="2" name="Title 1">
-            <a:extLst>
-              <a:ext uri="{FF2B5EF4-FFF2-40B4-BE49-F238E27FC236}">
                 <a16:creationId xmlns:a16="http://schemas.microsoft.com/office/drawing/2014/main" id="{A518A344-EC48-4764-9019-3C836BE7ACEE}"/>
               </a:ext>
             </a:extLst>
@@ -9843,7 +9721,7 @@
 </p:sld>
 </file>
 
-<file path=ppt/slides/slide14.xml><?xml version="1.0" encoding="utf-8"?>
+<file path=ppt/slides/slide13.xml><?xml version="1.0" encoding="utf-8"?>
 <p:sld xmlns:a="http://schemas.openxmlformats.org/drawingml/2006/main" xmlns:r="http://schemas.openxmlformats.org/officeDocument/2006/relationships" xmlns:p="http://schemas.openxmlformats.org/presentationml/2006/main">
   <p:cSld>
     <p:spTree>
@@ -9973,7 +9851,7 @@
 </p:sld>
 </file>
 
-<file path=ppt/slides/slide15.xml><?xml version="1.0" encoding="utf-8"?>
+<file path=ppt/slides/slide14.xml><?xml version="1.0" encoding="utf-8"?>
 <p:sld xmlns:a="http://schemas.openxmlformats.org/drawingml/2006/main" xmlns:r="http://schemas.openxmlformats.org/officeDocument/2006/relationships" xmlns:p="http://schemas.openxmlformats.org/presentationml/2006/main">
   <p:cSld>
     <p:spTree>
@@ -10117,6 +9995,128 @@
     <p:extLst>
       <p:ext uri="{BB962C8B-B14F-4D97-AF65-F5344CB8AC3E}">
         <p14:creationId xmlns:p14="http://schemas.microsoft.com/office/powerpoint/2010/main" val="1088560997"/>
+      </p:ext>
+    </p:extLst>
+  </p:cSld>
+  <p:clrMapOvr>
+    <a:masterClrMapping/>
+  </p:clrMapOvr>
+</p:sld>
+</file>
+
+<file path=ppt/slides/slide15.xml><?xml version="1.0" encoding="utf-8"?>
+<p:sld xmlns:a="http://schemas.openxmlformats.org/drawingml/2006/main" xmlns:r="http://schemas.openxmlformats.org/officeDocument/2006/relationships" xmlns:p="http://schemas.openxmlformats.org/presentationml/2006/main">
+  <p:cSld>
+    <p:spTree>
+      <p:nvGrpSpPr>
+        <p:cNvPr id="1" name=""/>
+        <p:cNvGrpSpPr/>
+        <p:nvPr/>
+      </p:nvGrpSpPr>
+      <p:grpSpPr>
+        <a:xfrm>
+          <a:off x="0" y="0"/>
+          <a:ext cx="0" cy="0"/>
+          <a:chOff x="0" y="0"/>
+          <a:chExt cx="0" cy="0"/>
+        </a:xfrm>
+      </p:grpSpPr>
+      <p:sp>
+        <p:nvSpPr>
+          <p:cNvPr id="2" name="Title 1">
+            <a:extLst>
+              <a:ext uri="{FF2B5EF4-FFF2-40B4-BE49-F238E27FC236}">
+                <a16:creationId xmlns:a16="http://schemas.microsoft.com/office/drawing/2014/main" id="{DFA997CB-72C9-40BB-8F35-C513EDD61399}"/>
+              </a:ext>
+            </a:extLst>
+          </p:cNvPr>
+          <p:cNvSpPr>
+            <a:spLocks noGrp="1"/>
+          </p:cNvSpPr>
+          <p:nvPr>
+            <p:ph type="title"/>
+          </p:nvPr>
+        </p:nvSpPr>
+        <p:spPr/>
+        <p:txBody>
+          <a:bodyPr/>
+          <a:lstStyle/>
+          <a:p>
+            <a:r>
+              <a:rPr lang="en-US">
+                <a:cs typeface="Calibri Light"/>
+              </a:rPr>
+              <a:t>Other Platforms</a:t>
+            </a:r>
+            <a:endParaRPr lang="en-US"/>
+          </a:p>
+        </p:txBody>
+      </p:sp>
+      <p:sp>
+        <p:nvSpPr>
+          <p:cNvPr id="3" name="Content Placeholder 2">
+            <a:extLst>
+              <a:ext uri="{FF2B5EF4-FFF2-40B4-BE49-F238E27FC236}">
+                <a16:creationId xmlns:a16="http://schemas.microsoft.com/office/drawing/2014/main" id="{72B9AFA0-2B31-44B0-8CEE-9179C42EE652}"/>
+              </a:ext>
+            </a:extLst>
+          </p:cNvPr>
+          <p:cNvSpPr>
+            <a:spLocks noGrp="1"/>
+          </p:cNvSpPr>
+          <p:nvPr>
+            <p:ph idx="1"/>
+          </p:nvPr>
+        </p:nvSpPr>
+        <p:spPr/>
+        <p:txBody>
+          <a:bodyPr vert="horz" lIns="91440" tIns="45720" rIns="91440" bIns="45720" rtlCol="0" anchor="t">
+            <a:normAutofit/>
+          </a:bodyPr>
+          <a:lstStyle/>
+          <a:p>
+            <a:r>
+              <a:rPr lang="en-US" dirty="0" err="1">
+                <a:cs typeface="Calibri"/>
+              </a:rPr>
+              <a:t>Ubidots</a:t>
+            </a:r>
+          </a:p>
+          <a:p>
+            <a:r>
+              <a:rPr lang="en-US" dirty="0">
+                <a:cs typeface="Calibri"/>
+              </a:rPr>
+              <a:t>Amazon Web Services</a:t>
+            </a:r>
+          </a:p>
+          <a:p>
+            <a:r>
+              <a:rPr lang="en-US" dirty="0">
+                <a:cs typeface="Calibri"/>
+              </a:rPr>
+              <a:t>Microsoft Azure</a:t>
+            </a:r>
+          </a:p>
+          <a:p>
+            <a:r>
+              <a:rPr lang="en-US" dirty="0" err="1">
+                <a:cs typeface="Calibri"/>
+              </a:rPr>
+              <a:t>Evothings</a:t>
+            </a:r>
+          </a:p>
+          <a:p>
+            <a:endParaRPr lang="en-US" dirty="0">
+              <a:cs typeface="Calibri"/>
+            </a:endParaRPr>
+          </a:p>
+        </p:txBody>
+      </p:sp>
+    </p:spTree>
+    <p:extLst>
+      <p:ext uri="{BB962C8B-B14F-4D97-AF65-F5344CB8AC3E}">
+        <p14:creationId xmlns:p14="http://schemas.microsoft.com/office/powerpoint/2010/main" val="2966305536"/>
       </p:ext>
     </p:extLst>
   </p:cSld>

--- a/topic-11-week11/unit-2/talk-1/platforms1.pptx
+++ b/topic-11-week11/unit-2/talk-1/platforms1.pptx
@@ -22,7 +22,7 @@
     <p:sldId id="280" r:id="rId13"/>
     <p:sldId id="288" r:id="rId14"/>
     <p:sldId id="289" r:id="rId15"/>
-    <p:sldId id="286" r:id="rId16"/>
+    <p:sldId id="290" r:id="rId16"/>
   </p:sldIdLst>
   <p:sldSz cx="12192000" cy="6858000"/>
   <p:notesSz cx="6858000" cy="9144000"/>
@@ -10021,12 +10021,59 @@
           <a:chExt cx="0" cy="0"/>
         </a:xfrm>
       </p:grpSpPr>
+      <p:pic>
+        <p:nvPicPr>
+          <p:cNvPr id="1026" name="Picture 2" descr="Control a Light with TalkBack on Arduino - MATLAB &amp; Simulink">
+            <a:extLst>
+              <a:ext uri="{FF2B5EF4-FFF2-40B4-BE49-F238E27FC236}">
+                <a16:creationId xmlns:a16="http://schemas.microsoft.com/office/drawing/2014/main" id="{F1AC04EB-C04C-0C68-231C-13F70D8BEE28}"/>
+              </a:ext>
+            </a:extLst>
+          </p:cNvPr>
+          <p:cNvPicPr>
+            <a:picLocks noChangeAspect="1" noChangeArrowheads="1"/>
+          </p:cNvPicPr>
+          <p:nvPr/>
+        </p:nvPicPr>
+        <p:blipFill>
+          <a:blip r:embed="rId2">
+            <a:extLst>
+              <a:ext uri="{28A0092B-C50C-407E-A947-70E740481C1C}">
+                <a14:useLocalDpi xmlns:a14="http://schemas.microsoft.com/office/drawing/2010/main" val="0"/>
+              </a:ext>
+            </a:extLst>
+          </a:blip>
+          <a:srcRect/>
+          <a:stretch>
+            <a:fillRect/>
+          </a:stretch>
+        </p:blipFill>
+        <p:spPr bwMode="auto">
+          <a:xfrm>
+            <a:off x="923630" y="4394200"/>
+            <a:ext cx="8010525" cy="2562225"/>
+          </a:xfrm>
+          <a:prstGeom prst="rect">
+            <a:avLst/>
+          </a:prstGeom>
+          <a:noFill/>
+          <a:extLst>
+            <a:ext uri="{909E8E84-426E-40DD-AFC4-6F175D3DCCD1}">
+              <a14:hiddenFill xmlns:a14="http://schemas.microsoft.com/office/drawing/2010/main">
+                <a:solidFill>
+                  <a:srgbClr val="FFFFFF"/>
+                </a:solidFill>
+              </a14:hiddenFill>
+            </a:ext>
+          </a:extLst>
+        </p:spPr>
+      </p:pic>
       <p:sp>
         <p:nvSpPr>
           <p:cNvPr id="2" name="Title 1">
             <a:extLst>
               <a:ext uri="{FF2B5EF4-FFF2-40B4-BE49-F238E27FC236}">
-                <a16:creationId xmlns:a16="http://schemas.microsoft.com/office/drawing/2014/main" id="{DFA997CB-72C9-40BB-8F35-C513EDD61399}"/>
+                <a16:creationId xmlns:a16="http://schemas.microsoft.com/office/drawing/2014/main" id="{B7EE8F88-D57F-7A29-2F87-4EE794CD65BA}"/>
               </a:ext>
             </a:extLst>
           </p:cNvPr>
@@ -10043,12 +10090,10 @@
           <a:lstStyle/>
           <a:p>
             <a:r>
-              <a:rPr lang="en-US">
-                <a:cs typeface="Calibri Light"/>
-              </a:rPr>
-              <a:t>Other Platforms</a:t>
-            </a:r>
-            <a:endParaRPr lang="en-US"/>
+              <a:rPr lang="en-GB" dirty="0"/>
+              <a:t>New - Talkback</a:t>
+            </a:r>
+            <a:endParaRPr lang="en-IE" dirty="0"/>
           </a:p>
         </p:txBody>
       </p:sp>
@@ -10057,7 +10102,7 @@
           <p:cNvPr id="3" name="Content Placeholder 2">
             <a:extLst>
               <a:ext uri="{FF2B5EF4-FFF2-40B4-BE49-F238E27FC236}">
-                <a16:creationId xmlns:a16="http://schemas.microsoft.com/office/drawing/2014/main" id="{72B9AFA0-2B31-44B0-8CEE-9179C42EE652}"/>
+                <a16:creationId xmlns:a16="http://schemas.microsoft.com/office/drawing/2014/main" id="{1C0DE6F9-8F21-B525-7C12-AA363FC82D5F}"/>
               </a:ext>
             </a:extLst>
           </p:cNvPr>
@@ -10068,55 +10113,214 @@
             <p:ph idx="1"/>
           </p:nvPr>
         </p:nvSpPr>
-        <p:spPr/>
+        <p:spPr>
+          <a:xfrm>
+            <a:off x="660400" y="1387475"/>
+            <a:ext cx="10515600" cy="3006725"/>
+          </a:xfrm>
+        </p:spPr>
         <p:txBody>
-          <a:bodyPr vert="horz" lIns="91440" tIns="45720" rIns="91440" bIns="45720" rtlCol="0" anchor="t">
-            <a:normAutofit/>
+          <a:bodyPr>
+            <a:normAutofit fontScale="70000" lnSpcReduction="20000"/>
           </a:bodyPr>
           <a:lstStyle/>
           <a:p>
             <a:r>
-              <a:rPr lang="en-US" dirty="0" err="1">
-                <a:cs typeface="Calibri"/>
-              </a:rPr>
-              <a:t>Ubidots</a:t>
-            </a:r>
-          </a:p>
-          <a:p>
-            <a:r>
-              <a:rPr lang="en-US" dirty="0">
-                <a:cs typeface="Calibri"/>
-              </a:rPr>
-              <a:t>Amazon Web Services</a:t>
-            </a:r>
-          </a:p>
-          <a:p>
-            <a:r>
-              <a:rPr lang="en-US" dirty="0">
-                <a:cs typeface="Calibri"/>
-              </a:rPr>
-              <a:t>Microsoft Azure</a:t>
-            </a:r>
-          </a:p>
-          <a:p>
-            <a:r>
-              <a:rPr lang="en-US" dirty="0" err="1">
-                <a:cs typeface="Calibri"/>
-              </a:rPr>
-              <a:t>Evothings</a:t>
-            </a:r>
-          </a:p>
-          <a:p>
-            <a:endParaRPr lang="en-US" dirty="0">
-              <a:cs typeface="Calibri"/>
-            </a:endParaRPr>
+              <a:rPr lang="en-GB" b="1" dirty="0" err="1"/>
+              <a:t>TalkBack</a:t>
+            </a:r>
+            <a:r>
+              <a:rPr lang="en-GB" dirty="0"/>
+              <a:t> is a </a:t>
+            </a:r>
+            <a:r>
+              <a:rPr lang="en-GB" b="1" dirty="0"/>
+              <a:t>cloud-side command queue</a:t>
+            </a:r>
+            <a:r>
+              <a:rPr lang="en-GB" dirty="0"/>
+              <a:t> in </a:t>
+            </a:r>
+            <a:r>
+              <a:rPr lang="en-GB" dirty="0" err="1"/>
+              <a:t>ThingSpeak</a:t>
+            </a:r>
+            <a:r>
+              <a:rPr lang="en-GB" dirty="0"/>
+              <a:t>.</a:t>
+            </a:r>
+          </a:p>
+          <a:p>
+            <a:r>
+              <a:rPr lang="en-GB" dirty="0"/>
+              <a:t>You (or an app) </a:t>
+            </a:r>
+            <a:r>
+              <a:rPr lang="en-GB" b="1" dirty="0"/>
+              <a:t>enqueue commands</a:t>
+            </a:r>
+            <a:r>
+              <a:rPr lang="en-GB" dirty="0"/>
+              <a:t>; devices </a:t>
+            </a:r>
+            <a:r>
+              <a:rPr lang="en-GB" b="1" dirty="0"/>
+              <a:t>poll and execute</a:t>
+            </a:r>
+            <a:r>
+              <a:rPr lang="en-GB" dirty="0"/>
+              <a:t> them later.</a:t>
+            </a:r>
+          </a:p>
+          <a:p>
+            <a:r>
+              <a:rPr lang="en-GB" dirty="0"/>
+              <a:t>Workflow:</a:t>
+            </a:r>
+          </a:p>
+          <a:p>
+            <a:pPr lvl="1"/>
+            <a:r>
+              <a:rPr lang="en-GB" b="1" dirty="0"/>
+              <a:t>App/User</a:t>
+            </a:r>
+            <a:r>
+              <a:rPr lang="en-GB" dirty="0"/>
+              <a:t> adds a command to a </a:t>
+            </a:r>
+            <a:r>
+              <a:rPr lang="en-GB" dirty="0" err="1"/>
+              <a:t>TalkBack</a:t>
+            </a:r>
+            <a:r>
+              <a:rPr lang="en-GB" dirty="0"/>
+              <a:t> queue (e.g., SET_FAN=ON)</a:t>
+            </a:r>
+          </a:p>
+          <a:p>
+            <a:pPr lvl="1"/>
+            <a:r>
+              <a:rPr lang="en-GB" b="1" dirty="0"/>
+              <a:t>Device polls</a:t>
+            </a:r>
+            <a:r>
+              <a:rPr lang="en-GB" dirty="0"/>
+              <a:t> </a:t>
+            </a:r>
+            <a:r>
+              <a:rPr lang="en-GB" dirty="0" err="1"/>
+              <a:t>TalkBack</a:t>
+            </a:r>
+            <a:r>
+              <a:rPr lang="en-GB" dirty="0"/>
+              <a:t> periodically (HTTP request)</a:t>
+            </a:r>
+          </a:p>
+          <a:p>
+            <a:pPr lvl="1"/>
+            <a:r>
+              <a:rPr lang="en-GB" dirty="0" err="1"/>
+              <a:t>ThingSpeak</a:t>
+            </a:r>
+            <a:r>
+              <a:rPr lang="en-GB" dirty="0"/>
+              <a:t> returns the </a:t>
+            </a:r>
+            <a:r>
+              <a:rPr lang="en-GB" b="1" dirty="0"/>
+              <a:t>next pending command</a:t>
+            </a:r>
+          </a:p>
+          <a:p>
+            <a:pPr lvl="1"/>
+            <a:r>
+              <a:rPr lang="en-GB" dirty="0"/>
+              <a:t>Device </a:t>
+            </a:r>
+            <a:r>
+              <a:rPr lang="en-GB" b="1" dirty="0"/>
+              <a:t>executes</a:t>
+            </a:r>
+            <a:r>
+              <a:rPr lang="en-GB" dirty="0"/>
+              <a:t> it and (optionally) </a:t>
+            </a:r>
+            <a:r>
+              <a:rPr lang="en-GB" b="1" dirty="0"/>
+              <a:t>logs status</a:t>
+            </a:r>
+            <a:r>
+              <a:rPr lang="en-GB" dirty="0"/>
+              <a:t> to a channel field</a:t>
+            </a:r>
+            <a:endParaRPr lang="en-IE" dirty="0"/>
+          </a:p>
+          <a:p>
+            <a:pPr marL="0" indent="0">
+              <a:buNone/>
+            </a:pPr>
+            <a:r>
+              <a:rPr lang="en-GB" b="1" dirty="0"/>
+              <a:t>API ideas (common pattern)</a:t>
+            </a:r>
+            <a:endParaRPr lang="en-GB" dirty="0"/>
+          </a:p>
+          <a:p>
+            <a:r>
+              <a:rPr lang="en-GB" b="1" dirty="0"/>
+              <a:t>Add command:</a:t>
+            </a:r>
+            <a:r>
+              <a:rPr lang="en-GB" dirty="0"/>
+              <a:t> .../talkbacks/&lt;ID&gt;/</a:t>
+            </a:r>
+            <a:r>
+              <a:rPr lang="en-GB" dirty="0" err="1"/>
+              <a:t>commands.json?api_key</a:t>
+            </a:r>
+            <a:r>
+              <a:rPr lang="en-GB" dirty="0"/>
+              <a:t>=...&amp;</a:t>
+            </a:r>
+            <a:r>
+              <a:rPr lang="en-GB" dirty="0" err="1"/>
+              <a:t>command_string</a:t>
+            </a:r>
+            <a:r>
+              <a:rPr lang="en-GB" dirty="0"/>
+              <a:t>=...</a:t>
+            </a:r>
+          </a:p>
+          <a:p>
+            <a:r>
+              <a:rPr lang="en-GB" b="1" dirty="0"/>
+              <a:t>Get next command:</a:t>
+            </a:r>
+            <a:r>
+              <a:rPr lang="en-GB" dirty="0"/>
+              <a:t> .../talkbacks/&lt;ID&gt;/commands/</a:t>
+            </a:r>
+            <a:r>
+              <a:rPr lang="en-GB" dirty="0" err="1"/>
+              <a:t>execute.json?api_key</a:t>
+            </a:r>
+            <a:r>
+              <a:rPr lang="en-GB" dirty="0"/>
+              <a:t>=..</a:t>
+            </a:r>
+          </a:p>
+          <a:p>
+            <a:pPr marL="457200" lvl="1" indent="0">
+              <a:buNone/>
+            </a:pPr>
+            <a:endParaRPr lang="en-GB" dirty="0"/>
           </a:p>
         </p:txBody>
       </p:sp>
     </p:spTree>
     <p:extLst>
       <p:ext uri="{BB962C8B-B14F-4D97-AF65-F5344CB8AC3E}">
-        <p14:creationId xmlns:p14="http://schemas.microsoft.com/office/powerpoint/2010/main" val="2966305536"/>
+        <p14:creationId xmlns:p14="http://schemas.microsoft.com/office/powerpoint/2010/main" val="2171175102"/>
       </p:ext>
     </p:extLst>
   </p:cSld>

--- a/topic-11-week11/unit-2/talk-1/platforms1.pptx
+++ b/topic-11-week11/unit-2/talk-1/platforms1.pptx
@@ -2278,13 +2278,13 @@
       <dgm:prSet presAssocID="{4817AE45-9867-4B80-8CC0-686BACACC02F}" presName="iconRect" presStyleLbl="node1" presStyleIdx="0" presStyleCnt="3"/>
       <dgm:spPr>
         <a:blipFill>
-          <a:blip xmlns:r="http://schemas.openxmlformats.org/officeDocument/2006/relationships" r:embed="rId1">
+          <a:blip xmlns:r="http://schemas.openxmlformats.org/officeDocument/2006/relationships">
             <a:extLst>
               <a:ext uri="{28A0092B-C50C-407E-A947-70E740481C1C}">
                 <a14:useLocalDpi xmlns:a14="http://schemas.microsoft.com/office/drawing/2010/main" val="0"/>
               </a:ext>
               <a:ext uri="{96DAC541-7B7A-43D3-8B79-37D633B846F1}">
-                <asvg:svgBlip xmlns:asvg="http://schemas.microsoft.com/office/drawing/2016/SVG/main" r:embed="rId2"/>
+                <asvg:svgBlip xmlns:asvg="http://schemas.microsoft.com/office/drawing/2016/SVG/main" r:embed="rId1"/>
               </a:ext>
             </a:extLst>
           </a:blip>
@@ -2331,13 +2331,13 @@
       <dgm:prSet presAssocID="{47C54959-3B86-4FA9-94D1-D346A8BAC971}" presName="iconRect" presStyleLbl="node1" presStyleIdx="1" presStyleCnt="3"/>
       <dgm:spPr>
         <a:blipFill>
-          <a:blip xmlns:r="http://schemas.openxmlformats.org/officeDocument/2006/relationships" r:embed="rId3">
+          <a:blip xmlns:r="http://schemas.openxmlformats.org/officeDocument/2006/relationships">
             <a:extLst>
               <a:ext uri="{28A0092B-C50C-407E-A947-70E740481C1C}">
                 <a14:useLocalDpi xmlns:a14="http://schemas.microsoft.com/office/drawing/2010/main" val="0"/>
               </a:ext>
               <a:ext uri="{96DAC541-7B7A-43D3-8B79-37D633B846F1}">
-                <asvg:svgBlip xmlns:asvg="http://schemas.microsoft.com/office/drawing/2016/SVG/main" r:embed="rId4"/>
+                <asvg:svgBlip xmlns:asvg="http://schemas.microsoft.com/office/drawing/2016/SVG/main" r:embed="rId2"/>
               </a:ext>
             </a:extLst>
           </a:blip>
@@ -2384,13 +2384,13 @@
       <dgm:prSet presAssocID="{A36A58F8-A2E1-4C2E-A052-7D72CF0CD4E7}" presName="iconRect" presStyleLbl="node1" presStyleIdx="2" presStyleCnt="3"/>
       <dgm:spPr>
         <a:blipFill>
-          <a:blip xmlns:r="http://schemas.openxmlformats.org/officeDocument/2006/relationships" r:embed="rId5">
+          <a:blip xmlns:r="http://schemas.openxmlformats.org/officeDocument/2006/relationships">
             <a:extLst>
               <a:ext uri="{28A0092B-C50C-407E-A947-70E740481C1C}">
                 <a14:useLocalDpi xmlns:a14="http://schemas.microsoft.com/office/drawing/2010/main" val="0"/>
               </a:ext>
               <a:ext uri="{96DAC541-7B7A-43D3-8B79-37D633B846F1}">
-                <asvg:svgBlip xmlns:asvg="http://schemas.microsoft.com/office/drawing/2016/SVG/main" r:embed="rId6"/>
+                <asvg:svgBlip xmlns:asvg="http://schemas.microsoft.com/office/drawing/2016/SVG/main" r:embed="rId3"/>
               </a:ext>
             </a:extLst>
           </a:blip>
@@ -3151,13 +3151,13 @@
           <a:avLst/>
         </a:prstGeom>
         <a:blipFill>
-          <a:blip xmlns:r="http://schemas.openxmlformats.org/officeDocument/2006/relationships" r:embed="rId1">
+          <a:blip xmlns:r="http://schemas.openxmlformats.org/officeDocument/2006/relationships">
             <a:extLst>
               <a:ext uri="{28A0092B-C50C-407E-A947-70E740481C1C}">
                 <a14:useLocalDpi xmlns:a14="http://schemas.microsoft.com/office/drawing/2010/main" val="0"/>
               </a:ext>
               <a:ext uri="{96DAC541-7B7A-43D3-8B79-37D633B846F1}">
-                <asvg:svgBlip xmlns:asvg="http://schemas.microsoft.com/office/drawing/2016/SVG/main" r:embed="rId2"/>
+                <asvg:svgBlip xmlns:asvg="http://schemas.microsoft.com/office/drawing/2016/SVG/main" r:embed="rId1"/>
               </a:ext>
             </a:extLst>
           </a:blip>
@@ -3300,13 +3300,13 @@
           <a:avLst/>
         </a:prstGeom>
         <a:blipFill>
-          <a:blip xmlns:r="http://schemas.openxmlformats.org/officeDocument/2006/relationships" r:embed="rId3">
+          <a:blip xmlns:r="http://schemas.openxmlformats.org/officeDocument/2006/relationships">
             <a:extLst>
               <a:ext uri="{28A0092B-C50C-407E-A947-70E740481C1C}">
                 <a14:useLocalDpi xmlns:a14="http://schemas.microsoft.com/office/drawing/2010/main" val="0"/>
               </a:ext>
               <a:ext uri="{96DAC541-7B7A-43D3-8B79-37D633B846F1}">
-                <asvg:svgBlip xmlns:asvg="http://schemas.microsoft.com/office/drawing/2016/SVG/main" r:embed="rId4"/>
+                <asvg:svgBlip xmlns:asvg="http://schemas.microsoft.com/office/drawing/2016/SVG/main" r:embed="rId2"/>
               </a:ext>
             </a:extLst>
           </a:blip>
@@ -3449,13 +3449,13 @@
           <a:avLst/>
         </a:prstGeom>
         <a:blipFill>
-          <a:blip xmlns:r="http://schemas.openxmlformats.org/officeDocument/2006/relationships" r:embed="rId5">
+          <a:blip xmlns:r="http://schemas.openxmlformats.org/officeDocument/2006/relationships">
             <a:extLst>
               <a:ext uri="{28A0092B-C50C-407E-A947-70E740481C1C}">
                 <a14:useLocalDpi xmlns:a14="http://schemas.microsoft.com/office/drawing/2010/main" val="0"/>
               </a:ext>
               <a:ext uri="{96DAC541-7B7A-43D3-8B79-37D633B846F1}">
-                <asvg:svgBlip xmlns:asvg="http://schemas.microsoft.com/office/drawing/2016/SVG/main" r:embed="rId6"/>
+                <asvg:svgBlip xmlns:asvg="http://schemas.microsoft.com/office/drawing/2016/SVG/main" r:embed="rId3"/>
               </a:ext>
             </a:extLst>
           </a:blip>
@@ -6088,7 +6088,7 @@
           <a:p>
             <a:fld id="{2E3CA026-0B95-4A00-933D-6AE5D99250E8}" type="datetimeFigureOut">
               <a:rPr lang="en-IE" smtClean="0"/>
-              <a:t>03/12/2025</a:t>
+              <a:t>29/04/2026</a:t>
             </a:fld>
             <a:endParaRPr lang="en-IE"/>
           </a:p>
@@ -6487,7 +6487,7 @@
           <a:p>
             <a:fld id="{846CE7D5-CF57-46EF-B807-FDD0502418D4}" type="datetimeFigureOut">
               <a:rPr lang="en-US" smtClean="0"/>
-              <a:t>12/3/2025</a:t>
+              <a:t>4/29/2026</a:t>
             </a:fld>
             <a:endParaRPr lang="en-US"/>
           </a:p>
@@ -6657,7 +6657,7 @@
           <a:p>
             <a:fld id="{846CE7D5-CF57-46EF-B807-FDD0502418D4}" type="datetimeFigureOut">
               <a:rPr lang="en-US" smtClean="0"/>
-              <a:t>12/3/2025</a:t>
+              <a:t>4/29/2026</a:t>
             </a:fld>
             <a:endParaRPr lang="en-US"/>
           </a:p>
@@ -6837,7 +6837,7 @@
           <a:p>
             <a:fld id="{846CE7D5-CF57-46EF-B807-FDD0502418D4}" type="datetimeFigureOut">
               <a:rPr lang="en-US" smtClean="0"/>
-              <a:t>12/3/2025</a:t>
+              <a:t>4/29/2026</a:t>
             </a:fld>
             <a:endParaRPr lang="en-US"/>
           </a:p>
@@ -7007,7 +7007,7 @@
           <a:p>
             <a:fld id="{846CE7D5-CF57-46EF-B807-FDD0502418D4}" type="datetimeFigureOut">
               <a:rPr lang="en-US" smtClean="0"/>
-              <a:t>12/3/2025</a:t>
+              <a:t>4/29/2026</a:t>
             </a:fld>
             <a:endParaRPr lang="en-US"/>
           </a:p>
@@ -7253,7 +7253,7 @@
           <a:p>
             <a:fld id="{846CE7D5-CF57-46EF-B807-FDD0502418D4}" type="datetimeFigureOut">
               <a:rPr lang="en-US" smtClean="0"/>
-              <a:t>12/3/2025</a:t>
+              <a:t>4/29/2026</a:t>
             </a:fld>
             <a:endParaRPr lang="en-US"/>
           </a:p>
@@ -7485,7 +7485,7 @@
           <a:p>
             <a:fld id="{846CE7D5-CF57-46EF-B807-FDD0502418D4}" type="datetimeFigureOut">
               <a:rPr lang="en-US" smtClean="0"/>
-              <a:t>12/3/2025</a:t>
+              <a:t>4/29/2026</a:t>
             </a:fld>
             <a:endParaRPr lang="en-US"/>
           </a:p>
@@ -7852,7 +7852,7 @@
           <a:p>
             <a:fld id="{846CE7D5-CF57-46EF-B807-FDD0502418D4}" type="datetimeFigureOut">
               <a:rPr lang="en-US" smtClean="0"/>
-              <a:t>12/3/2025</a:t>
+              <a:t>4/29/2026</a:t>
             </a:fld>
             <a:endParaRPr lang="en-US"/>
           </a:p>
@@ -7970,7 +7970,7 @@
           <a:p>
             <a:fld id="{846CE7D5-CF57-46EF-B807-FDD0502418D4}" type="datetimeFigureOut">
               <a:rPr lang="en-US" smtClean="0"/>
-              <a:t>12/3/2025</a:t>
+              <a:t>4/29/2026</a:t>
             </a:fld>
             <a:endParaRPr lang="en-US"/>
           </a:p>
@@ -8065,7 +8065,7 @@
           <a:p>
             <a:fld id="{846CE7D5-CF57-46EF-B807-FDD0502418D4}" type="datetimeFigureOut">
               <a:rPr lang="en-US" smtClean="0"/>
-              <a:t>12/3/2025</a:t>
+              <a:t>4/29/2026</a:t>
             </a:fld>
             <a:endParaRPr lang="en-US"/>
           </a:p>
@@ -8342,7 +8342,7 @@
           <a:p>
             <a:fld id="{846CE7D5-CF57-46EF-B807-FDD0502418D4}" type="datetimeFigureOut">
               <a:rPr lang="en-US" smtClean="0"/>
-              <a:t>12/3/2025</a:t>
+              <a:t>4/29/2026</a:t>
             </a:fld>
             <a:endParaRPr lang="en-US"/>
           </a:p>
@@ -8599,7 +8599,7 @@
           <a:p>
             <a:fld id="{846CE7D5-CF57-46EF-B807-FDD0502418D4}" type="datetimeFigureOut">
               <a:rPr lang="en-US" smtClean="0"/>
-              <a:t>12/3/2025</a:t>
+              <a:t>4/29/2026</a:t>
             </a:fld>
             <a:endParaRPr lang="en-US"/>
           </a:p>
@@ -8812,7 +8812,7 @@
           <a:p>
             <a:fld id="{846CE7D5-CF57-46EF-B807-FDD0502418D4}" type="datetimeFigureOut">
               <a:rPr lang="en-US" smtClean="0"/>
-              <a:t>12/3/2025</a:t>
+              <a:t>4/29/2026</a:t>
             </a:fld>
             <a:endParaRPr lang="en-US"/>
           </a:p>
@@ -10484,73 +10484,73 @@
           <a:custGeom>
             <a:avLst/>
             <a:gdLst>
-              <a:gd name="connsiteX0" fmla="*/ 0 w 3474720"/>
-              <a:gd name="connsiteY0" fmla="*/ 0 h 18288"/>
-              <a:gd name="connsiteX1" fmla="*/ 694944 w 3474720"/>
-              <a:gd name="connsiteY1" fmla="*/ 0 h 18288"/>
-              <a:gd name="connsiteX2" fmla="*/ 1355141 w 3474720"/>
-              <a:gd name="connsiteY2" fmla="*/ 0 h 18288"/>
-              <a:gd name="connsiteX3" fmla="*/ 2015338 w 3474720"/>
-              <a:gd name="connsiteY3" fmla="*/ 0 h 18288"/>
-              <a:gd name="connsiteX4" fmla="*/ 2779776 w 3474720"/>
-              <a:gd name="connsiteY4" fmla="*/ 0 h 18288"/>
-              <a:gd name="connsiteX5" fmla="*/ 3474720 w 3474720"/>
-              <a:gd name="connsiteY5" fmla="*/ 0 h 18288"/>
-              <a:gd name="connsiteX6" fmla="*/ 3474720 w 3474720"/>
-              <a:gd name="connsiteY6" fmla="*/ 18288 h 18288"/>
-              <a:gd name="connsiteX7" fmla="*/ 2779776 w 3474720"/>
-              <a:gd name="connsiteY7" fmla="*/ 18288 h 18288"/>
-              <a:gd name="connsiteX8" fmla="*/ 2189074 w 3474720"/>
-              <a:gd name="connsiteY8" fmla="*/ 18288 h 18288"/>
-              <a:gd name="connsiteX9" fmla="*/ 1528877 w 3474720"/>
-              <a:gd name="connsiteY9" fmla="*/ 18288 h 18288"/>
-              <a:gd name="connsiteX10" fmla="*/ 868680 w 3474720"/>
-              <a:gd name="connsiteY10" fmla="*/ 18288 h 18288"/>
-              <a:gd name="connsiteX11" fmla="*/ 0 w 3474720"/>
-              <a:gd name="connsiteY11" fmla="*/ 18288 h 18288"/>
-              <a:gd name="connsiteX12" fmla="*/ 0 w 3474720"/>
-              <a:gd name="connsiteY12" fmla="*/ 0 h 18288"/>
+              <a:gd name="csX0" fmla="*/ 0 w 3474720"/>
+              <a:gd name="csY0" fmla="*/ 0 h 18288"/>
+              <a:gd name="csX1" fmla="*/ 694944 w 3474720"/>
+              <a:gd name="csY1" fmla="*/ 0 h 18288"/>
+              <a:gd name="csX2" fmla="*/ 1355141 w 3474720"/>
+              <a:gd name="csY2" fmla="*/ 0 h 18288"/>
+              <a:gd name="csX3" fmla="*/ 2015338 w 3474720"/>
+              <a:gd name="csY3" fmla="*/ 0 h 18288"/>
+              <a:gd name="csX4" fmla="*/ 2779776 w 3474720"/>
+              <a:gd name="csY4" fmla="*/ 0 h 18288"/>
+              <a:gd name="csX5" fmla="*/ 3474720 w 3474720"/>
+              <a:gd name="csY5" fmla="*/ 0 h 18288"/>
+              <a:gd name="csX6" fmla="*/ 3474720 w 3474720"/>
+              <a:gd name="csY6" fmla="*/ 18288 h 18288"/>
+              <a:gd name="csX7" fmla="*/ 2779776 w 3474720"/>
+              <a:gd name="csY7" fmla="*/ 18288 h 18288"/>
+              <a:gd name="csX8" fmla="*/ 2189074 w 3474720"/>
+              <a:gd name="csY8" fmla="*/ 18288 h 18288"/>
+              <a:gd name="csX9" fmla="*/ 1528877 w 3474720"/>
+              <a:gd name="csY9" fmla="*/ 18288 h 18288"/>
+              <a:gd name="csX10" fmla="*/ 868680 w 3474720"/>
+              <a:gd name="csY10" fmla="*/ 18288 h 18288"/>
+              <a:gd name="csX11" fmla="*/ 0 w 3474720"/>
+              <a:gd name="csY11" fmla="*/ 18288 h 18288"/>
+              <a:gd name="csX12" fmla="*/ 0 w 3474720"/>
+              <a:gd name="csY12" fmla="*/ 0 h 18288"/>
             </a:gdLst>
             <a:ahLst/>
             <a:cxnLst>
               <a:cxn ang="0">
-                <a:pos x="connsiteX0" y="connsiteY0"/>
+                <a:pos x="csX0" y="csY0"/>
               </a:cxn>
               <a:cxn ang="0">
-                <a:pos x="connsiteX1" y="connsiteY1"/>
+                <a:pos x="csX1" y="csY1"/>
               </a:cxn>
               <a:cxn ang="0">
-                <a:pos x="connsiteX2" y="connsiteY2"/>
+                <a:pos x="csX2" y="csY2"/>
               </a:cxn>
               <a:cxn ang="0">
-                <a:pos x="connsiteX3" y="connsiteY3"/>
+                <a:pos x="csX3" y="csY3"/>
               </a:cxn>
               <a:cxn ang="0">
-                <a:pos x="connsiteX4" y="connsiteY4"/>
+                <a:pos x="csX4" y="csY4"/>
               </a:cxn>
               <a:cxn ang="0">
-                <a:pos x="connsiteX5" y="connsiteY5"/>
+                <a:pos x="csX5" y="csY5"/>
               </a:cxn>
               <a:cxn ang="0">
-                <a:pos x="connsiteX6" y="connsiteY6"/>
+                <a:pos x="csX6" y="csY6"/>
               </a:cxn>
               <a:cxn ang="0">
-                <a:pos x="connsiteX7" y="connsiteY7"/>
+                <a:pos x="csX7" y="csY7"/>
               </a:cxn>
               <a:cxn ang="0">
-                <a:pos x="connsiteX8" y="connsiteY8"/>
+                <a:pos x="csX8" y="csY8"/>
               </a:cxn>
               <a:cxn ang="0">
-                <a:pos x="connsiteX9" y="connsiteY9"/>
+                <a:pos x="csX9" y="csY9"/>
               </a:cxn>
               <a:cxn ang="0">
-                <a:pos x="connsiteX10" y="connsiteY10"/>
+                <a:pos x="csX10" y="csY10"/>
               </a:cxn>
               <a:cxn ang="0">
-                <a:pos x="connsiteX11" y="connsiteY11"/>
+                <a:pos x="csX11" y="csY11"/>
               </a:cxn>
               <a:cxn ang="0">
-                <a:pos x="connsiteX12" y="connsiteY12"/>
+                <a:pos x="csX12" y="csY12"/>
               </a:cxn>
             </a:cxnLst>
             <a:rect l="l" t="t" r="r" b="b"/>
